--- a/2026/1005-IDEAL-RAG(Final)/IDEAL-RAG_2026-10-05_Meeting.pptx
+++ b/2026/1005-IDEAL-RAG(Final)/IDEAL-RAG_2026-10-05_Meeting.pptx
@@ -169,7 +169,7 @@
 <file path=ppt/charts/chart1.xml><?xml version="1.0" encoding="utf-8"?>
 <c:chartSpace xmlns:c="http://schemas.openxmlformats.org/drawingml/2006/chart" xmlns:a="http://schemas.openxmlformats.org/drawingml/2006/main" xmlns:r="http://schemas.openxmlformats.org/officeDocument/2006/relationships" xmlns:c16r2="http://schemas.microsoft.com/office/drawing/2015/06/chart">
   <c:date1904 val="1"/>
-  <c:lang val="en-US"/>
+  <c:lang val="zh-TW"/>
   <c:roundedCorners val="1"/>
   <c:style val="2"/>
   <c:chart>
@@ -510,7 +510,7 @@
 <file path=ppt/charts/chart2.xml><?xml version="1.0" encoding="utf-8"?>
 <c:chartSpace xmlns:c="http://schemas.openxmlformats.org/drawingml/2006/chart" xmlns:a="http://schemas.openxmlformats.org/drawingml/2006/main" xmlns:r="http://schemas.openxmlformats.org/officeDocument/2006/relationships" xmlns:c16r2="http://schemas.microsoft.com/office/drawing/2015/06/chart">
   <c:date1904 val="1"/>
-  <c:lang val="en-US"/>
+  <c:lang val="zh-TW"/>
   <c:roundedCorners val="1"/>
   <c:style val="2"/>
   <c:chart>
